--- a/TV_AI_AGENT/backend/output/roboai_academy_application/powerpoint/slide_0.pptx
+++ b/TV_AI_AGENT/backend/output/roboai_academy_application/powerpoint/slide_0.pptx
@@ -3162,6 +3162,15 @@
               </a:spcBef>
             </a:pPr>
             <a:r>
+              <a:rPr lang="en-US" sz="5547" b="1">
+                <a:solidFill>
+                  <a:srgbClr val="FFFFFF"/>
+                </a:solidFill>
+                <a:latin typeface="Canva Sans Bold"/>
+                <a:ea typeface="Canva Sans Bold"/>
+                <a:cs typeface="Canva Sans Bold"/>
+                <a:sym typeface="Canva Sans Bold"/>
+              </a:rPr>
               <a:t>Apply to study at the RoboAI Academy!</a:t>
             </a:r>
           </a:p>
@@ -3197,7 +3206,16 @@
               </a:spcBef>
             </a:pPr>
             <a:r>
-              <a:t>Information session on March 24, application period ends April 12, 2026</a:t>
+              <a:rPr lang="en-US" sz="3219" b="1">
+                <a:solidFill>
+                  <a:srgbClr val="FFFFFF"/>
+                </a:solidFill>
+                <a:latin typeface="Canva Sans Bold"/>
+                <a:ea typeface="Canva Sans Bold"/>
+                <a:cs typeface="Canva Sans Bold"/>
+                <a:sym typeface="Canva Sans Bold"/>
+              </a:rPr>
+              <a:t>Application open March 24 to April 12, 2026</a:t>
             </a:r>
           </a:p>
         </p:txBody>
@@ -3232,7 +3250,16 @@
               </a:spcBef>
             </a:pPr>
             <a:r>
-              <a:t>The RoboAI Academy offers hands-on engineering learning through projects from companies. Applications for the group starting in autumn 2026 are open from March 24 to April 12. Eligibility is for engineering students of Satakunta University of Applied Sciences who have completed at least the first year.</a:t>
+              <a:rPr lang="en-US" sz="2775" b="1">
+                <a:solidFill>
+                  <a:srgbClr val="FFFFFF"/>
+                </a:solidFill>
+                <a:latin typeface="Canva Sans Bold"/>
+                <a:ea typeface="Canva Sans Bold"/>
+                <a:cs typeface="Canva Sans Bold"/>
+                <a:sym typeface="Canva Sans Bold"/>
+              </a:rPr>
+              <a:t>Engineering students learn through hands-on projects rather than traditional lectures. Projects cover robotics, AI, and programming based on company needs.</a:t>
             </a:r>
           </a:p>
         </p:txBody>
